--- a/assets/media/e77_interim.pptx
+++ b/assets/media/e77_interim.pptx
@@ -532,7 +532,7 @@
           </a:p>
           <a:p>
             <a:r>
-              <a:t>シンカイテイ。秒の一桁、零。忘れるな。</a:t>
+              <a:t>シンカイテイ セツゾク。秒の一桁、零。忘れるな。</a:t>
             </a:r>
           </a:p>
         </p:txBody>
@@ -4300,7 +4300,7 @@
                 </a:solidFill>
                 <a:latin typeface="Meiryo"/>
               </a:rPr>
-              <a:t>枠の外まで来たか。いいだろう——扉の名は「シンカイテイ」。カタカナ6文字だ。だが名を知るだけでは開かない。条件は、最後の頁のノートに。</a:t>
+              <a:t>枠の外まで来たか。いいだろう——扉の名は「シンカイテイ」。カタカナ6文字だ。ただし呼びかけには「セツゾク」を添えること。名だけでは、扉は応えない。条件は、最後の頁のノートに。</a:t>
             </a:r>
           </a:p>
         </p:txBody>
